--- a/Presentation_Kimoto_Fukabe_2026.pptx
+++ b/Presentation_Kimoto_Fukabe_2026.pptx
@@ -4449,7 +4449,7 @@
         <p:spPr>
           <a:xfrm>
             <a:off x="3993368" y="3822192"/>
-            <a:ext cx="4522988" cy="594360"/>
+            <a:ext cx="4522988" cy="461772"/>
           </a:xfrm>
           <a:prstGeom prst="rect">
             <a:avLst/>
@@ -4481,7 +4481,7 @@
         <p:spPr>
           <a:xfrm>
             <a:off x="3993368" y="3822192"/>
-            <a:ext cx="50292" cy="594360"/>
+            <a:ext cx="50292" cy="461772"/>
           </a:xfrm>
           <a:prstGeom prst="rect">
             <a:avLst/>
@@ -28530,7 +28530,7 @@
               <a:buNone/>
             </a:pPr>
             <a:r>
-              <a:rPr lang="en-US" sz="1050" b="1" dirty="0">
+              <a:rPr lang="en-US" sz="1050" b="1" dirty="0" err="1">
                 <a:solidFill>
                   <a:srgbClr val="1A1A2E"/>
                 </a:solidFill>
@@ -28538,7 +28538,18 @@
                 <a:ea typeface="Courier New" pitchFamily="34" charset="-122"/>
                 <a:cs typeface="Courier New" pitchFamily="34" charset="-120"/>
               </a:rPr>
-              <a:t>Vanlentin's pipeline/</a:t>
+              <a:t>Survival_Analysis</a:t>
+            </a:r>
+            <a:r>
+              <a:rPr lang="en-US" sz="1050" b="1" dirty="0">
+                <a:solidFill>
+                  <a:srgbClr val="1A1A2E"/>
+                </a:solidFill>
+                <a:latin typeface="Courier New" pitchFamily="34" charset="0"/>
+                <a:ea typeface="Courier New" pitchFamily="34" charset="-122"/>
+                <a:cs typeface="Courier New" pitchFamily="34" charset="-120"/>
+              </a:rPr>
+              <a:t>/</a:t>
             </a:r>
             <a:endParaRPr lang="en-US" sz="1050" dirty="0"/>
           </a:p>
@@ -29272,7 +29283,7 @@
                 <a:ea typeface="Arial" pitchFamily="34" charset="-122"/>
                 <a:cs typeface="Arial" pitchFamily="34" charset="-120"/>
               </a:rPr>
-              <a:t>■  Gray = Existing (Valentin's code)</a:t>
+              <a:t>■  Gray = Already existing</a:t>
             </a:r>
             <a:endParaRPr lang="en-US" sz="1100" dirty="0"/>
           </a:p>
